--- a/deliverables/slides.pptx
+++ b/deliverables/slides.pptx
@@ -128,14 +128,14 @@
   <p:extLst>
     <p:ext uri="{521415D9-36F7-43E2-AB2F-B90AF26B5E84}">
       <p14:sectionLst xmlns:p14="http://schemas.microsoft.com/office/powerpoint/2010/main">
-        <p14:section name="บทนำ" id="{08ca54fe-bf53-2d4b-bf18-cc7d60f0efab}">
+        <p14:section name="บทนำ" id="{fcd48c5f-3815-301e-9ecf-447fe1a0a4c8}">
           <p14:sldIdLst>
             <p14:sldId id="256"/>
             <p14:sldId id="257"/>
             <p14:sldId id="258"/>
           </p14:sldIdLst>
         </p14:section>
-        <p14:section name="ข้อมูล" id="{ed0990f4-9410-8da3-9eaa-66023f4edcad}">
+        <p14:section name="ข้อมูล" id="{8e1777b7-2d5a-efe6-cce9-951c1b20e664}">
           <p14:sldIdLst>
             <p14:sldId id="259"/>
             <p14:sldId id="260"/>
@@ -145,7 +145,7 @@
             <p14:sldId id="264"/>
           </p14:sldIdLst>
         </p14:section>
-        <p14:section name="โมเดล" id="{8ec60988-27d7-223d-641b-2eb73b169231}">
+        <p14:section name="โมเดล" id="{1942f0d4-0780-2a7b-f40b-ffe53953ffdf}">
           <p14:sldIdLst>
             <p14:sldId id="265"/>
             <p14:sldId id="266"/>
@@ -154,7 +154,7 @@
             <p14:sldId id="269"/>
           </p14:sldIdLst>
         </p14:section>
-        <p14:section name="ผลการทดลอง" id="{307c7c67-816a-1262-9225-ce244de7185b}">
+        <p14:section name="ผลการทดลอง" id="{f902e820-aedd-f503-45f0-98364a061c6b}">
           <p14:sldIdLst>
             <p14:sldId id="270"/>
             <p14:sldId id="271"/>
@@ -163,7 +163,7 @@
             <p14:sldId id="274"/>
           </p14:sldIdLst>
         </p14:section>
-        <p14:section name="อภิปรายและสรุป" id="{31fdc9e1-23b0-bf1f-c2eb-69f940db773c}">
+        <p14:section name="อภิปรายและสรุป" id="{5234a8c3-9907-d25e-0ae1-6e82647dc651}">
           <p14:sldIdLst>
             <p14:sldId id="275"/>
             <p14:sldId id="276"/>
@@ -1368,7 +1368,7 @@
           <a:p>
             <a:r>
               <a:rPr lang="en-US" dirty="0"/>
-              <a:t>เราพิสูจน์ความถูกต้องสามทาง หนึ่ง เทียบคำทำนายกับ library ทีละแถว 14 จาก 19 โมเดลตรงกันทุกแถวหรือถึงทศนิยมสุดท้าย ตัวที่ต่างมีเหตุผลอธิบายได้ เช่นกฎหยุดวนรอบต่างกัน สอง โมเดลทั้ง 38 ชุดบันทึก โหลดกลับ แล้วทำนายได้ค่าเดิม สาม มี test อัตโนมัติกว่า 1,200 ข้อ รวม test ที่กันข้อมูลรั่ว</a:t>
+              <a:t>เราพิสูจน์ความถูกต้องสามทาง หนึ่ง เทียบคำทำนายกับ library ทีละแถว 14 จาก 19 โมเดลตรงกันทุกแถว หรือต่างไม่เกินระดับ 1e-15 ตัวที่ต่างมีเหตุผลอธิบายได้ เช่นกฎหยุดวนรอบต่างกัน สอง โมเดลทั้ง 38 ชุดบันทึก โหลดกลับ แล้วทำนายได้ค่าเดิม สาม มี test อัตโนมัติกว่า 1,200 ข้อ รวม test ที่กันข้อมูลรั่ว</a:t>
             </a:r>
             <a:endParaRPr lang="en-US" dirty="0"/>
           </a:p>
@@ -6889,7 +6889,7 @@
                   <a:schemeClr val="tx2"/>
                 </a:solidFill>
               </a:rPr>
-              <a:t>โมเดลที่คำทำนายตรงกับ scikit-learn / XGBoost ทุกแถว</a:t>
+              <a:t>โมเดลที่ตรงกับ scikit-learn / XGBoost ถึงระดับ 1e-15 หรือตรงทุกแถว</a:t>
             </a:r>
             <a:endParaRPr lang="en-US" sz="1400" dirty="0"/>
           </a:p>
@@ -7081,7 +7081,7 @@
                             <a:schemeClr val="bg1"/>
                           </a:solidFill>
                         </a:rPr>
-                        <a:t>โมเดลที่ไม่ตรงทุกแถว</a:t>
+                        <a:t>อีก 5 โมเดล</a:t>
                       </a:r>
                       <a:endParaRPr lang="en-US" sz="1300" dirty="0"/>
                     </a:p>

--- a/deliverables/slides.pptx
+++ b/deliverables/slides.pptx
@@ -7327,7 +7327,7 @@
                             <a:schemeClr val="tx1"/>
                           </a:solidFill>
                         </a:rPr>
-                        <a:t>≤ 2e-06</a:t>
+                        <a:t>≤ 3e-06</a:t>
                       </a:r>
                       <a:endParaRPr lang="en-US" sz="1300" dirty="0"/>
                     </a:p>

--- a/deliverables/slides.pptx
+++ b/deliverables/slides.pptx
@@ -13,6 +13,8 @@
     <p:sldId id="261" r:id="rId7"/>
     <p:sldId id="262" r:id="rId8"/>
     <p:sldId id="263" r:id="rId9"/>
+    <p:sldId id="278" r:id="rId29"/>
+    <p:sldId id="279" r:id="rId30"/>
     <p:sldId id="264" r:id="rId10"/>
     <p:sldId id="265" r:id="rId11"/>
     <p:sldId id="266" r:id="rId12"/>
@@ -1039,7 +1041,7 @@
           <a:p>
             <a:fld id="{F7021451-1387-4CA6-816F-3879F97B5CBC}" type="slidenum">
               <a:rPr lang="en-US"/>
-              <a:t>10</a:t>
+              <a:t>12</a:t>
             </a:fld>
             <a:endParaRPr lang="en-US"/>
           </a:p>
@@ -1127,7 +1129,7 @@
           <a:p>
             <a:fld id="{F7021451-1387-4CA6-816F-3879F97B5CBC}" type="slidenum">
               <a:rPr lang="en-US"/>
-              <a:t>11</a:t>
+              <a:t>13</a:t>
             </a:fld>
             <a:endParaRPr lang="en-US"/>
           </a:p>
@@ -1215,7 +1217,7 @@
           <a:p>
             <a:fld id="{F7021451-1387-4CA6-816F-3879F97B5CBC}" type="slidenum">
               <a:rPr lang="en-US"/>
-              <a:t>12</a:t>
+              <a:t>14</a:t>
             </a:fld>
             <a:endParaRPr lang="en-US"/>
           </a:p>
@@ -1303,7 +1305,7 @@
           <a:p>
             <a:fld id="{F7021451-1387-4CA6-816F-3879F97B5CBC}" type="slidenum">
               <a:rPr lang="en-US"/>
-              <a:t>13</a:t>
+              <a:t>15</a:t>
             </a:fld>
             <a:endParaRPr lang="en-US"/>
           </a:p>
@@ -1391,7 +1393,7 @@
           <a:p>
             <a:fld id="{F7021451-1387-4CA6-816F-3879F97B5CBC}" type="slidenum">
               <a:rPr lang="en-US"/>
-              <a:t>14</a:t>
+              <a:t>16</a:t>
             </a:fld>
             <a:endParaRPr lang="en-US"/>
           </a:p>
@@ -1479,7 +1481,7 @@
           <a:p>
             <a:fld id="{F7021451-1387-4CA6-816F-3879F97B5CBC}" type="slidenum">
               <a:rPr lang="en-US"/>
-              <a:t>15</a:t>
+              <a:t>17</a:t>
             </a:fld>
             <a:endParaRPr lang="en-US"/>
           </a:p>
@@ -1567,7 +1569,7 @@
           <a:p>
             <a:fld id="{F7021451-1387-4CA6-816F-3879F97B5CBC}" type="slidenum">
               <a:rPr lang="en-US"/>
-              <a:t>16</a:t>
+              <a:t>18</a:t>
             </a:fld>
             <a:endParaRPr lang="en-US"/>
           </a:p>
@@ -1655,7 +1657,7 @@
           <a:p>
             <a:fld id="{F7021451-1387-4CA6-816F-3879F97B5CBC}" type="slidenum">
               <a:rPr lang="en-US"/>
-              <a:t>17</a:t>
+              <a:t>19</a:t>
             </a:fld>
             <a:endParaRPr lang="en-US"/>
           </a:p>
@@ -1743,7 +1745,7 @@
           <a:p>
             <a:fld id="{F7021451-1387-4CA6-816F-3879F97B5CBC}" type="slidenum">
               <a:rPr lang="en-US"/>
-              <a:t>18</a:t>
+              <a:t>20</a:t>
             </a:fld>
             <a:endParaRPr lang="en-US"/>
           </a:p>
@@ -1831,7 +1833,7 @@
           <a:p>
             <a:fld id="{F7021451-1387-4CA6-816F-3879F97B5CBC}" type="slidenum">
               <a:rPr lang="en-US"/>
-              <a:t>19</a:t>
+              <a:t>21</a:t>
             </a:fld>
             <a:endParaRPr lang="en-US"/>
           </a:p>
@@ -2007,7 +2009,7 @@
           <a:p>
             <a:fld id="{F7021451-1387-4CA6-816F-3879F97B5CBC}" type="slidenum">
               <a:rPr lang="en-US"/>
-              <a:t>20</a:t>
+              <a:t>22</a:t>
             </a:fld>
             <a:endParaRPr lang="en-US"/>
           </a:p>
@@ -2095,7 +2097,7 @@
           <a:p>
             <a:fld id="{F7021451-1387-4CA6-816F-3879F97B5CBC}" type="slidenum">
               <a:rPr lang="en-US"/>
-              <a:t>21</a:t>
+              <a:t>23</a:t>
             </a:fld>
             <a:endParaRPr lang="en-US"/>
           </a:p>
@@ -2183,7 +2185,7 @@
           <a:p>
             <a:fld id="{F7021451-1387-4CA6-816F-3879F97B5CBC}" type="slidenum">
               <a:rPr lang="en-US"/>
-              <a:t>22</a:t>
+              <a:t>24</a:t>
             </a:fld>
             <a:endParaRPr lang="en-US"/>
           </a:p>
@@ -2193,6 +2195,182 @@
     <p:extLst>
       <p:ext uri="{BB962C8B-B14F-4D97-AF65-F5344CB8AC3E}">
         <p14:creationId xmlns:p14="http://schemas.microsoft.com/office/powerpoint/2010/main" val="1024086991"/>
+      </p:ext>
+    </p:extLst>
+  </p:cSld>
+  <p:clrMapOvr>
+    <a:masterClrMapping/>
+  </p:clrMapOvr>
+</p:notes>
+</file>
+
+<file path=ppt/notesSlides/notesSlide23.xml><?xml version="1.0" encoding="utf-8"?>
+<p:notes xmlns:a="http://schemas.openxmlformats.org/drawingml/2006/main" xmlns:r="http://schemas.openxmlformats.org/officeDocument/2006/relationships" xmlns:p="http://schemas.openxmlformats.org/presentationml/2006/main">
+  <p:cSld>
+    <p:spTree>
+      <p:nvGrpSpPr>
+        <p:cNvPr id="1" name=""/>
+        <p:cNvGrpSpPr/>
+        <p:nvPr/>
+      </p:nvGrpSpPr>
+      <p:grpSpPr>
+        <a:xfrm>
+          <a:off x="0" y="0"/>
+          <a:ext cx="0" cy="0"/>
+          <a:chOff x="0" y="0"/>
+          <a:chExt cx="0" cy="0"/>
+        </a:xfrm>
+      </p:grpSpPr>
+      <p:sp>
+        <p:nvSpPr>
+          <p:cNvPr id="2" name="Slide Image Placeholder 1"/>
+          <p:cNvSpPr>
+            <a:spLocks noGrp="1" noRot="1" noChangeAspect="1"/>
+          </p:cNvSpPr>
+          <p:nvPr>
+            <p:ph type="sldImg"/>
+          </p:nvPr>
+        </p:nvSpPr>
+        <p:spPr/>
+      </p:sp>
+      <p:sp>
+        <p:nvSpPr>
+          <p:cNvPr id="3" name="Notes Placeholder 2"/>
+          <p:cNvSpPr>
+            <a:spLocks noGrp="1"/>
+          </p:cNvSpPr>
+          <p:nvPr>
+            <p:ph type="body" idx="1"/>
+          </p:nvPr>
+        </p:nvSpPr>
+        <p:spPr/>
+        <p:txBody>
+          <a:bodyPr/>
+          <a:lstStyle/>
+          <a:p>
+            <a:r>
+              <a:rPr lang="en-US" dirty="0"/>
+              <a:t>ทำไมถึงเลือกเกณฑ์นี้ มีเหตุผลสามข้อ ข้อแรก เกณฑ์ถูกกำหนดจากข้อมูลเทรนและตรึงไว้ก่อนเทรนโมเดลตัวแรก จึงไม่ได้ถูกปรับตามผลการทดลอง ข้อสอง เราใช้ควอร์ไทล์แทนค่าเฉลี่ยกับส่วนเบี่ยงเบนมาตรฐาน เพราะส่วนเบี่ยงเบนมาตรฐานถูกดึงโดยวันสุดโต่งที่เรากำลังตามหา เมื่อเอาวัน spike 19 วันออก เส้นแบ่งแบบ 3 SD ขยับ 11.8 เปอร์เซ็นต์ ส่วนเส้นแบ่งแบบ IQR ขยับเพียง 3.0 เปอร์เซ็นต์ ข้อสาม ตัวคูณ 3 จับเฉพาะวันที่สุดโต่งจริง จากรูป ถ้าใช้ตัวคูณ 1.5 จะต้องตัดข้อมูลเทรนเกือบ 40 เปอร์เซ็นต์ และเหลือวันผันผวนสูงเพียง 52 จาก 433 วัน การทดลองจะไม่ได้ตอบคำถามเรื่อง spike อีกต่อไป ส่วนเกณฑ์ที่ใช้ตัดเพียง 12 เปอร์เซ็นต์ และเหลือวันผันผวนสูง 280 วัน เกณฑ์ทางเลือกในรูปนี้ใช้เทียบจำนวนข้อมูลเท่านั้น ไม่ได้นำไปเทรนโมเดล และเราไม่ได้อ้างว่าตัวคูณ 3 ดีที่สุด รายละเอียดทั้งหมดอยู่ใน notebook 06</a:t>
+            </a:r>
+            <a:endParaRPr lang="en-US" dirty="0"/>
+          </a:p>
+        </p:txBody>
+      </p:sp>
+      <p:sp>
+        <p:nvSpPr>
+          <p:cNvPr id="4" name="Slide Number Placeholder 3"/>
+          <p:cNvSpPr>
+            <a:spLocks noGrp="1"/>
+          </p:cNvSpPr>
+          <p:nvPr>
+            <p:ph type="sldNum" sz="quarter" idx="10"/>
+          </p:nvPr>
+        </p:nvSpPr>
+        <p:spPr/>
+        <p:txBody>
+          <a:bodyPr/>
+          <a:lstStyle/>
+          <a:p>
+            <a:fld id="{F7021451-1387-4CA6-816F-3879F97B5CBC}" type="slidenum">
+              <a:rPr lang="en-US"/>
+              <a:t>9</a:t>
+            </a:fld>
+            <a:endParaRPr lang="en-US"/>
+          </a:p>
+        </p:txBody>
+      </p:sp>
+    </p:spTree>
+    <p:extLst>
+      <p:ext uri="{BB962C8B-B14F-4D97-AF65-F5344CB8AC3E}">
+        <p14:creationId xmlns:p14="http://schemas.microsoft.com/office/powerpoint/2010/main" val="1024087023"/>
+      </p:ext>
+    </p:extLst>
+  </p:cSld>
+  <p:clrMapOvr>
+    <a:masterClrMapping/>
+  </p:clrMapOvr>
+</p:notes>
+</file>
+
+<file path=ppt/notesSlides/notesSlide24.xml><?xml version="1.0" encoding="utf-8"?>
+<p:notes xmlns:a="http://schemas.openxmlformats.org/drawingml/2006/main" xmlns:r="http://schemas.openxmlformats.org/officeDocument/2006/relationships" xmlns:p="http://schemas.openxmlformats.org/presentationml/2006/main">
+  <p:cSld>
+    <p:spTree>
+      <p:nvGrpSpPr>
+        <p:cNvPr id="1" name=""/>
+        <p:cNvGrpSpPr/>
+        <p:nvPr/>
+      </p:nvGrpSpPr>
+      <p:grpSpPr>
+        <a:xfrm>
+          <a:off x="0" y="0"/>
+          <a:ext cx="0" cy="0"/>
+          <a:chOff x="0" y="0"/>
+          <a:chExt cx="0" cy="0"/>
+        </a:xfrm>
+      </p:grpSpPr>
+      <p:sp>
+        <p:nvSpPr>
+          <p:cNvPr id="2" name="Slide Image Placeholder 1"/>
+          <p:cNvSpPr>
+            <a:spLocks noGrp="1" noRot="1" noChangeAspect="1"/>
+          </p:cNvSpPr>
+          <p:nvPr>
+            <p:ph type="sldImg"/>
+          </p:nvPr>
+        </p:nvSpPr>
+        <p:spPr/>
+      </p:sp>
+      <p:sp>
+        <p:nvSpPr>
+          <p:cNvPr id="3" name="Notes Placeholder 2"/>
+          <p:cNvSpPr>
+            <a:spLocks noGrp="1"/>
+          </p:cNvSpPr>
+          <p:nvPr>
+            <p:ph type="body" idx="1"/>
+          </p:nvPr>
+        </p:nvSpPr>
+        <p:spPr/>
+        <p:txBody>
+          <a:bodyPr/>
+          <a:lstStyle/>
+          <a:p>
+            <a:r>
+              <a:rPr lang="en-US" dirty="0"/>
+              <a:t>ทำไมเราตัด 213 แถว ทั้งที่วัน spike มีเพียง 19 วัน เพราะแถวข้างเคียงก็มีข้อมูลของวัน spike อยู่ข้างใน รูปนี้คือตัวอย่างจริงรอบวันที่ 26 ธันวาคม 2018 ซึ่งราคาขึ้น 6.24 เปอร์เซ็นต์ รูปบนคือ target ที่ระยะ 6 วันก่อน spike ยังเป็น 0.24 แต่ที่ระยะ 5 วันก่อนกระโดดเป็น 0.62 ทันที เพราะ 5 วันข้างหน้าของแถวนั้นเริ่มรวมวัน spike รูปล่างคือความผันผวนย้อนหลัง 20 วัน ซึ่งพุ่งขึ้นในวัน spike แล้วค้างสูงจนถึงวันที่ 19 หลัง spike ก่อนลดลงในวันถัดไป ขอบของพื้นที่แรเงาจึงตรงกับจุดที่ข้อมูลของวัน spike เข้าและออกจากการคำนวณพอดี เราจึงตัด 25 แถวต่อ spike หนึ่งวัน หน้าต่างที่ซ้อนกันนับครั้งเดียว รวมเป็น 213 แถว ข้อยกเว้นคือ RSI ซึ่งคำนวณแบบเฉลี่ยสะสม อิทธิพลของ spike จึงค่อย ๆ จางลงและอาจเหลืออยู่บ้างหลังหน้าต่าง</a:t>
+            </a:r>
+            <a:endParaRPr lang="en-US" dirty="0"/>
+          </a:p>
+        </p:txBody>
+      </p:sp>
+      <p:sp>
+        <p:nvSpPr>
+          <p:cNvPr id="4" name="Slide Number Placeholder 3"/>
+          <p:cNvSpPr>
+            <a:spLocks noGrp="1"/>
+          </p:cNvSpPr>
+          <p:nvPr>
+            <p:ph type="sldNum" sz="quarter" idx="10"/>
+          </p:nvPr>
+        </p:nvSpPr>
+        <p:spPr/>
+        <p:txBody>
+          <a:bodyPr/>
+          <a:lstStyle/>
+          <a:p>
+            <a:fld id="{F7021451-1387-4CA6-816F-3879F97B5CBC}" type="slidenum">
+              <a:rPr lang="en-US"/>
+              <a:t>10</a:t>
+            </a:fld>
+            <a:endParaRPr lang="en-US"/>
+          </a:p>
+        </p:txBody>
+      </p:sp>
+    </p:spTree>
+    <p:extLst>
+      <p:ext uri="{BB962C8B-B14F-4D97-AF65-F5344CB8AC3E}">
+        <p14:creationId xmlns:p14="http://schemas.microsoft.com/office/powerpoint/2010/main" val="1024087024"/>
       </p:ext>
     </p:extLst>
   </p:cSld>
@@ -2799,7 +2977,7 @@
           <a:p>
             <a:fld id="{F7021451-1387-4CA6-816F-3879F97B5CBC}" type="slidenum">
               <a:rPr lang="en-US"/>
-              <a:t>9</a:t>
+              <a:t>11</a:t>
             </a:fld>
             <a:endParaRPr lang="en-US"/>
           </a:p>
@@ -4430,7 +4608,7 @@
             <a:pPr algn="r"/>
             <a:fld id="{F7021451-1387-4CA6-816F-3879F97B5CBC}" type="slidenum">
               <a:rPr b="0" lang="en-US"/>
-              <a:t>10</a:t>
+              <a:t>12</a:t>
             </a:fld>
             <a:endParaRPr lang="en-US"/>
           </a:p>
@@ -5184,7 +5362,7 @@
             <a:pPr algn="r"/>
             <a:fld id="{F7021451-1387-4CA6-816F-3879F97B5CBC}" type="slidenum">
               <a:rPr b="0" lang="en-US"/>
-              <a:t>11</a:t>
+              <a:t>13</a:t>
             </a:fld>
             <a:endParaRPr lang="en-US"/>
           </a:p>
@@ -5799,7 +5977,7 @@
             <a:pPr algn="r"/>
             <a:fld id="{F7021451-1387-4CA6-816F-3879F97B5CBC}" type="slidenum">
               <a:rPr b="0" lang="en-US"/>
-              <a:t>12</a:t>
+              <a:t>14</a:t>
             </a:fld>
             <a:endParaRPr lang="en-US"/>
           </a:p>
@@ -6754,7 +6932,7 @@
             <a:pPr algn="r"/>
             <a:fld id="{F7021451-1387-4CA6-816F-3879F97B5CBC}" type="slidenum">
               <a:rPr b="0" lang="en-US"/>
-              <a:t>13</a:t>
+              <a:t>15</a:t>
             </a:fld>
             <a:endParaRPr lang="en-US"/>
           </a:p>
@@ -8219,7 +8397,7 @@
             <a:pPr algn="r"/>
             <a:fld id="{F7021451-1387-4CA6-816F-3879F97B5CBC}" type="slidenum">
               <a:rPr b="0" lang="en-US"/>
-              <a:t>14</a:t>
+              <a:t>16</a:t>
             </a:fld>
             <a:endParaRPr lang="en-US"/>
           </a:p>
@@ -8455,7 +8633,7 @@
             <a:pPr algn="r"/>
             <a:fld id="{F7021451-1387-4CA6-816F-3879F97B5CBC}" type="slidenum">
               <a:rPr b="0" lang="en-US"/>
-              <a:t>15</a:t>
+              <a:t>17</a:t>
             </a:fld>
             <a:endParaRPr lang="en-US"/>
           </a:p>
@@ -11344,7 +11522,7 @@
             <a:pPr algn="r"/>
             <a:fld id="{F7021451-1387-4CA6-816F-3879F97B5CBC}" type="slidenum">
               <a:rPr b="0" lang="en-US"/>
-              <a:t>16</a:t>
+              <a:t>18</a:t>
             </a:fld>
             <a:endParaRPr lang="en-US"/>
           </a:p>
@@ -11536,7 +11714,7 @@
             <a:pPr algn="r"/>
             <a:fld id="{F7021451-1387-4CA6-816F-3879F97B5CBC}" type="slidenum">
               <a:rPr b="0" lang="en-US"/>
-              <a:t>17</a:t>
+              <a:t>19</a:t>
             </a:fld>
             <a:endParaRPr lang="en-US"/>
           </a:p>
@@ -11762,7 +11940,7 @@
             <a:pPr algn="r"/>
             <a:fld id="{F7021451-1387-4CA6-816F-3879F97B5CBC}" type="slidenum">
               <a:rPr b="0" lang="en-US"/>
-              <a:t>18</a:t>
+              <a:t>20</a:t>
             </a:fld>
             <a:endParaRPr lang="en-US"/>
           </a:p>
@@ -14440,7 +14618,7 @@
             <a:pPr algn="r"/>
             <a:fld id="{F7021451-1387-4CA6-816F-3879F97B5CBC}" type="slidenum">
               <a:rPr b="0" lang="en-US"/>
-              <a:t>19</a:t>
+              <a:t>21</a:t>
             </a:fld>
             <a:endParaRPr lang="en-US"/>
           </a:p>
@@ -15145,7 +15323,7 @@
             <a:pPr algn="r"/>
             <a:fld id="{F7021451-1387-4CA6-816F-3879F97B5CBC}" type="slidenum">
               <a:rPr b="0" lang="en-US"/>
-              <a:t>20</a:t>
+              <a:t>22</a:t>
             </a:fld>
             <a:endParaRPr lang="en-US"/>
           </a:p>
@@ -15610,7 +15788,7 @@
             <a:pPr algn="r"/>
             <a:fld id="{F7021451-1387-4CA6-816F-3879F97B5CBC}" type="slidenum">
               <a:rPr b="0" lang="en-US"/>
-              <a:t>21</a:t>
+              <a:t>23</a:t>
             </a:fld>
             <a:endParaRPr lang="en-US"/>
           </a:p>
@@ -16238,7 +16416,731 @@
             <a:pPr algn="r"/>
             <a:fld id="{F7021451-1387-4CA6-816F-3879F97B5CBC}" type="slidenum">
               <a:rPr b="0" lang="en-US"/>
-              <a:t>22</a:t>
+              <a:t>24</a:t>
+            </a:fld>
+            <a:endParaRPr lang="en-US"/>
+          </a:p>
+        </p:txBody>
+      </p:sp>
+    </p:spTree>
+  </p:cSld>
+  <p:clrMapOvr>
+    <a:masterClrMapping/>
+  </p:clrMapOvr>
+</p:sld>
+</file>
+
+<file path=ppt/slides/slide23.xml><?xml version="1.0" encoding="utf-8"?>
+<p:sld xmlns:a="http://schemas.openxmlformats.org/drawingml/2006/main" xmlns:r="http://schemas.openxmlformats.org/officeDocument/2006/relationships" xmlns:p="http://schemas.openxmlformats.org/presentationml/2006/main">
+  <p:cSld name="Spike rule">
+    <p:spTree>
+      <p:nvGrpSpPr>
+        <p:cNvPr id="1" name=""/>
+        <p:cNvGrpSpPr/>
+        <p:nvPr/>
+      </p:nvGrpSpPr>
+      <p:grpSpPr>
+        <a:xfrm>
+          <a:off x="0" y="0"/>
+          <a:ext cx="0" cy="0"/>
+          <a:chOff x="0" y="0"/>
+          <a:chExt cx="0" cy="0"/>
+        </a:xfrm>
+      </p:grpSpPr>
+      <p:sp>
+        <p:nvSpPr>
+          <p:cNvPr id="2" name="Text 0"/>
+          <p:cNvSpPr/>
+          <p:nvPr>
+            <p:ph idx="100" type="title" hasCustomPrompt="1"/>
+          </p:nvPr>
+        </p:nvSpPr>
+        <p:spPr>
+          <a:xfrm>
+            <a:off x="548640" y="384048"/>
+            <a:ext cx="11091672" cy="868680"/>
+          </a:xfrm>
+          <a:prstGeom prst="rect">
+            <a:avLst/>
+          </a:prstGeom>
+          <a:noFill/>
+          <a:ln/>
+        </p:spPr>
+        <p:txBody>
+          <a:bodyPr wrap="square" lIns="0" tIns="0" rIns="0" bIns="0" rtlCol="0" anchor="ctr"/>
+          <a:lstStyle/>
+          <a:p>
+            <a:pPr algn="l" indent="0" marL="0">
+              <a:buNone/>
+            </a:pPr>
+            <a:r>
+              <a:rPr lang="en-US" sz="3200" b="1" dirty="0">
+                <a:solidFill>
+                  <a:schemeClr val="tx1"/>
+                </a:solidFill>
+              </a:rPr>
+              <a:t>ทำไมใช้ Q3 + 3 × IQR: ตัดเฉพาะวันที่สุดโต่งจริง</a:t>
+            </a:r>
+            <a:endParaRPr lang="en-US" sz="3200" dirty="0"/>
+          </a:p>
+        </p:txBody>
+      </p:sp>
+      <p:pic>
+        <p:nvPicPr>
+          <p:cNvPr id="4" name="Image 0" descr="จำนวนแถวของ Train ที่ถูกตัดเมื่อใช้เกณฑ์ spike แต่ละแบบ">    </p:cNvPr>
+          <p:cNvPicPr>
+            <a:picLocks noChangeAspect="1"/>
+          </p:cNvPicPr>
+          <p:nvPr/>
+        </p:nvPicPr>
+        <p:blipFill>
+          <a:blip r:embed="rId1"/>
+          <a:stretch>
+            <a:fillRect/>
+          </a:stretch>
+        </p:blipFill>
+        <p:spPr>
+          <a:xfrm>
+            <a:off x="548640" y="1508760"/>
+            <a:ext cx="7315200" cy="3814862"/>
+          </a:xfrm>
+          <a:prstGeom prst="rect">
+            <a:avLst/>
+          </a:prstGeom>
+        </p:spPr>
+      </p:pic>
+      <p:sp>
+        <p:nvSpPr>
+          <p:cNvPr id="5" name="Text 1"/>
+          <p:cNvSpPr txBox="1"/>
+          <p:nvPr/>
+        </p:nvSpPr>
+        <p:spPr>
+          <a:xfrm>
+            <a:off x="8229600" y="1463040"/>
+            <a:ext cx="3383280" cy="868680"/>
+          </a:xfrm>
+          <a:prstGeom prst="rect">
+            <a:avLst/>
+          </a:prstGeom>
+          <a:noFill/>
+          <a:ln/>
+        </p:spPr>
+        <p:txBody>
+          <a:bodyPr wrap="square" lIns="0" tIns="0" rIns="0" bIns="0" rtlCol="0" anchor="ctr"/>
+          <a:lstStyle/>
+          <a:p>
+            <a:pPr indent="0" marL="0">
+              <a:buNone/>
+            </a:pPr>
+            <a:r>
+              <a:rPr lang="en-US" sz="4400" b="1" dirty="0">
+                <a:solidFill>
+                  <a:schemeClr val="accent2"/>
+                </a:solidFill>
+              </a:rPr>
+              <a:t>12%</a:t>
+            </a:r>
+            <a:endParaRPr lang="en-US" sz="4400" dirty="0"/>
+          </a:p>
+        </p:txBody>
+      </p:sp>
+      <p:sp>
+        <p:nvSpPr>
+          <p:cNvPr id="6" name="Text 2"/>
+          <p:cNvSpPr txBox="1"/>
+          <p:nvPr/>
+        </p:nvSpPr>
+        <p:spPr>
+          <a:xfrm>
+            <a:off x="8229600" y="2359152"/>
+            <a:ext cx="3383280" cy="868680"/>
+          </a:xfrm>
+          <a:prstGeom prst="rect">
+            <a:avLst/>
+          </a:prstGeom>
+          <a:noFill/>
+          <a:ln/>
+        </p:spPr>
+        <p:txBody>
+          <a:bodyPr wrap="square" lIns="0" tIns="0" rIns="0" bIns="0" rtlCol="0" anchor="t"/>
+          <a:lstStyle/>
+          <a:p>
+            <a:pPr indent="0" marL="0">
+              <a:buNone/>
+            </a:pPr>
+            <a:r>
+              <a:rPr lang="en-US" sz="1400" dirty="0">
+                <a:solidFill>
+                  <a:schemeClr val="tx2"/>
+                </a:solidFill>
+              </a:rPr>
+              <a:t>ของ Train ถูกตัดด้วยตัวคูณ 3 เหลือวันผันผวนสูง 280 จาก 433 วัน</a:t>
+            </a:r>
+            <a:endParaRPr lang="en-US" sz="1400" dirty="0"/>
+          </a:p>
+        </p:txBody>
+      </p:sp>
+      <p:sp>
+        <p:nvSpPr>
+          <p:cNvPr id="7" name="Text 3"/>
+          <p:cNvSpPr txBox="1"/>
+          <p:nvPr/>
+        </p:nvSpPr>
+        <p:spPr>
+          <a:xfrm>
+            <a:off x="8229600" y="3337560"/>
+            <a:ext cx="3383280" cy="868680"/>
+          </a:xfrm>
+          <a:prstGeom prst="rect">
+            <a:avLst/>
+          </a:prstGeom>
+          <a:noFill/>
+          <a:ln/>
+        </p:spPr>
+        <p:txBody>
+          <a:bodyPr wrap="square" lIns="0" tIns="0" rIns="0" bIns="0" rtlCol="0" anchor="ctr"/>
+          <a:lstStyle/>
+          <a:p>
+            <a:pPr indent="0" marL="0">
+              <a:buNone/>
+            </a:pPr>
+            <a:r>
+              <a:rPr lang="en-US" sz="4400" b="1" dirty="0">
+                <a:solidFill>
+                  <a:schemeClr val="accent1"/>
+                </a:solidFill>
+              </a:rPr>
+              <a:t>40%</a:t>
+            </a:r>
+            <a:endParaRPr lang="en-US" sz="4400" dirty="0"/>
+          </a:p>
+        </p:txBody>
+      </p:sp>
+      <p:sp>
+        <p:nvSpPr>
+          <p:cNvPr id="8" name="Text 4"/>
+          <p:cNvSpPr txBox="1"/>
+          <p:nvPr/>
+        </p:nvSpPr>
+        <p:spPr>
+          <a:xfrm>
+            <a:off x="8229600" y="4233672"/>
+            <a:ext cx="3383280" cy="868680"/>
+          </a:xfrm>
+          <a:prstGeom prst="rect">
+            <a:avLst/>
+          </a:prstGeom>
+          <a:noFill/>
+          <a:ln/>
+        </p:spPr>
+        <p:txBody>
+          <a:bodyPr wrap="square" lIns="0" tIns="0" rIns="0" bIns="0" rtlCol="0" anchor="t"/>
+          <a:lstStyle/>
+          <a:p>
+            <a:pPr indent="0" marL="0">
+              <a:buNone/>
+            </a:pPr>
+            <a:r>
+              <a:rPr lang="en-US" sz="1400" dirty="0">
+                <a:solidFill>
+                  <a:schemeClr val="tx2"/>
+                </a:solidFill>
+              </a:rPr>
+              <a:t>จะถูกตัดถ้าใช้ตัวคูณ 1.5 เหลือวันผันผวนสูงเพียง 52 วัน</a:t>
+            </a:r>
+            <a:endParaRPr lang="en-US" sz="1400" dirty="0"/>
+          </a:p>
+        </p:txBody>
+      </p:sp>
+      <p:sp>
+        <p:nvSpPr>
+          <p:cNvPr id="9" name="Text 5"/>
+          <p:cNvSpPr txBox="1"/>
+          <p:nvPr/>
+        </p:nvSpPr>
+        <p:spPr>
+          <a:xfrm>
+            <a:off x="8229600" y="5212080"/>
+            <a:ext cx="3383280" cy="1005840"/>
+          </a:xfrm>
+          <a:prstGeom prst="rect">
+            <a:avLst/>
+          </a:prstGeom>
+          <a:noFill/>
+          <a:ln/>
+        </p:spPr>
+        <p:txBody>
+          <a:bodyPr wrap="square" lIns="0" tIns="0" rIns="0" bIns="0" rtlCol="0" anchor="t"/>
+          <a:lstStyle/>
+          <a:p>
+            <a:pPr indent="0" marL="0">
+              <a:buNone/>
+            </a:pPr>
+            <a:r>
+              <a:rPr lang="en-US" sz="1400" dirty="0">
+                <a:solidFill>
+                  <a:schemeClr val="tx2"/>
+                </a:solidFill>
+              </a:rPr>
+              <a:t>เส้นแบ่งจาก IQR ขยับ 3.0% เมื่อเอาวัน spike ออก ส่วนเส้นแบ่งจาก SD ขยับ 11.8%</a:t>
+            </a:r>
+            <a:endParaRPr lang="en-US" sz="1400" dirty="0"/>
+          </a:p>
+        </p:txBody>
+      </p:sp>
+      <p:sp>
+        <p:nvSpPr>
+          <p:cNvPr id="10" name="Text 6"/>
+          <p:cNvSpPr txBox="1"/>
+          <p:nvPr/>
+        </p:nvSpPr>
+        <p:spPr>
+          <a:xfrm>
+            <a:off x="548640" y="5532120"/>
+            <a:ext cx="7315200" cy="640080"/>
+          </a:xfrm>
+          <a:prstGeom prst="rect">
+            <a:avLst/>
+          </a:prstGeom>
+          <a:noFill/>
+          <a:ln/>
+        </p:spPr>
+        <p:txBody>
+          <a:bodyPr wrap="square" lIns="0" tIns="0" rIns="0" bIns="0" rtlCol="0" anchor="t"/>
+          <a:lstStyle/>
+          <a:p>
+            <a:pPr indent="0" marL="0">
+              <a:buNone/>
+            </a:pPr>
+            <a:r>
+              <a:rPr lang="en-US" sz="1200" dirty="0">
+                <a:solidFill>
+                  <a:schemeClr val="tx2"/>
+                </a:solidFill>
+              </a:rPr>
+              <a:t>เกณฑ์คำนวณจาก Train และตรึงไว้ก่อนเทรนโมเดล · เกณฑ์ทางเลือกใช้เทียบจำนวนข้อมูลเท่านั้น ไม่ได้นำไปเทรน</a:t>
+            </a:r>
+            <a:endParaRPr lang="en-US" sz="1200" dirty="0"/>
+          </a:p>
+          <a:p>
+            <a:pPr indent="0" marL="0">
+              <a:buNone/>
+            </a:pPr>
+            <a:r>
+              <a:rPr lang="en-US" sz="1200" dirty="0">
+                <a:solidFill>
+                  <a:schemeClr val="tx2"/>
+                </a:solidFill>
+              </a:rPr>
+              <a:t>ที่มา: notebooks/06_spike_analysis.ipynb</a:t>
+            </a:r>
+            <a:endParaRPr lang="en-US" sz="1200" dirty="0"/>
+          </a:p>
+        </p:txBody>
+      </p:sp>
+      <p:sp>
+        <p:nvSpPr>
+          <p:cNvPr id="25" name="Slide Number Placeholder 0"/>
+          <p:cNvSpPr>
+            <a:spLocks noGrp="1"/>
+          </p:cNvSpPr>
+          <p:nvPr>
+            <p:ph type="sldNum" sz="quarter" idx="4294967295"/>
+          </p:nvPr>
+        </p:nvSpPr>
+        <p:spPr>
+          <a:xfrm>
+            <a:off x="11091672" y="6419088"/>
+            <a:ext cx="548640" cy="274320"/>
+          </a:xfrm>
+          <a:prstGeom prst="rect">
+            <a:avLst/>
+          </a:prstGeom>
+          <a:extLst>
+            <a:ext uri="{C572A759-6A51-4108-AA02-DFA0A04FC94B}">
+              <ma14:wrappingTextBoxFlag xmlns:ma14="http://schemas.microsoft.com/office/mac/drawingml/2011/main" val="0"/>
+            </a:ext>
+          </a:extLst>
+        </p:spPr>
+        <p:txBody>
+          <a:bodyPr/>
+          <a:lstStyle>
+            <a:lvl1pPr>
+              <a:defRPr sz="1000">
+                <a:solidFill>
+                  <a:schemeClr val="tx2"/>
+                </a:solidFill>
+              </a:defRPr>
+            </a:lvl1pPr>
+          </a:lstStyle>
+          <a:p>
+            <a:pPr algn="r"/>
+            <a:fld id="{F7021451-1387-4CA6-816F-3879F97B5CBC}" type="slidenum">
+              <a:rPr b="0" lang="en-US"/>
+              <a:t>9</a:t>
+            </a:fld>
+            <a:endParaRPr lang="en-US"/>
+          </a:p>
+        </p:txBody>
+      </p:sp>
+    </p:spTree>
+  </p:cSld>
+  <p:clrMapOvr>
+    <a:masterClrMapping/>
+  </p:clrMapOvr>
+</p:sld>
+</file>
+
+<file path=ppt/slides/slide24.xml><?xml version="1.0" encoding="utf-8"?>
+<p:sld xmlns:a="http://schemas.openxmlformats.org/drawingml/2006/main" xmlns:r="http://schemas.openxmlformats.org/officeDocument/2006/relationships" xmlns:p="http://schemas.openxmlformats.org/presentationml/2006/main">
+  <p:cSld name="Spike window">
+    <p:spTree>
+      <p:nvGrpSpPr>
+        <p:cNvPr id="1" name=""/>
+        <p:cNvGrpSpPr/>
+        <p:nvPr/>
+      </p:nvGrpSpPr>
+      <p:grpSpPr>
+        <a:xfrm>
+          <a:off x="0" y="0"/>
+          <a:ext cx="0" cy="0"/>
+          <a:chOff x="0" y="0"/>
+          <a:chExt cx="0" cy="0"/>
+        </a:xfrm>
+      </p:grpSpPr>
+      <p:sp>
+        <p:nvSpPr>
+          <p:cNvPr id="2" name="Text 0"/>
+          <p:cNvSpPr/>
+          <p:nvPr>
+            <p:ph idx="100" type="title" hasCustomPrompt="1"/>
+          </p:nvPr>
+        </p:nvSpPr>
+        <p:spPr>
+          <a:xfrm>
+            <a:off x="548640" y="384048"/>
+            <a:ext cx="11091672" cy="868680"/>
+          </a:xfrm>
+          <a:prstGeom prst="rect">
+            <a:avLst/>
+          </a:prstGeom>
+          <a:noFill/>
+          <a:ln/>
+        </p:spPr>
+        <p:txBody>
+          <a:bodyPr wrap="square" lIns="0" tIns="0" rIns="0" bIns="0" rtlCol="0" anchor="ctr"/>
+          <a:lstStyle/>
+          <a:p>
+            <a:pPr algn="l" indent="0" marL="0">
+              <a:buNone/>
+            </a:pPr>
+            <a:r>
+              <a:rPr lang="en-US" sz="3200" b="1" dirty="0">
+                <a:solidFill>
+                  <a:schemeClr val="tx1"/>
+                </a:solidFill>
+              </a:rPr>
+              <a:t>ทำไมตัดทั้งหน้าต่าง 25 แถว ไม่ใช่แค่วัน spike</a:t>
+            </a:r>
+            <a:endParaRPr lang="en-US" sz="3200" dirty="0"/>
+          </a:p>
+        </p:txBody>
+      </p:sp>
+      <p:pic>
+        <p:nvPicPr>
+          <p:cNvPr id="4" name="Image 0" descr="target และความผันผวนย้อนหลัง 20 วัน รอบวัน spike 26 ธันวาคม 2018">    </p:cNvPr>
+          <p:cNvPicPr>
+            <a:picLocks noChangeAspect="1"/>
+          </p:cNvPicPr>
+          <p:nvPr/>
+        </p:nvPicPr>
+        <p:blipFill>
+          <a:blip r:embed="rId1"/>
+          <a:stretch>
+            <a:fillRect/>
+          </a:stretch>
+        </p:blipFill>
+        <p:spPr>
+          <a:xfrm>
+            <a:off x="548640" y="1508760"/>
+            <a:ext cx="6949440" cy="3840987"/>
+          </a:xfrm>
+          <a:prstGeom prst="rect">
+            <a:avLst/>
+          </a:prstGeom>
+        </p:spPr>
+      </p:pic>
+      <p:sp>
+        <p:nvSpPr>
+          <p:cNvPr id="5" name="Text 1"/>
+          <p:cNvSpPr txBox="1"/>
+          <p:nvPr/>
+        </p:nvSpPr>
+        <p:spPr>
+          <a:xfrm>
+            <a:off x="8229600" y="1463040"/>
+            <a:ext cx="3383280" cy="868680"/>
+          </a:xfrm>
+          <a:prstGeom prst="rect">
+            <a:avLst/>
+          </a:prstGeom>
+          <a:noFill/>
+          <a:ln/>
+        </p:spPr>
+        <p:txBody>
+          <a:bodyPr wrap="square" lIns="0" tIns="0" rIns="0" bIns="0" rtlCol="0" anchor="ctr"/>
+          <a:lstStyle/>
+          <a:p>
+            <a:pPr indent="0" marL="0">
+              <a:buNone/>
+            </a:pPr>
+            <a:r>
+              <a:rPr lang="en-US" sz="4400" b="1" dirty="0">
+                <a:solidFill>
+                  <a:schemeClr val="accent2"/>
+                </a:solidFill>
+              </a:rPr>
+              <a:t>5 วัน</a:t>
+            </a:r>
+            <a:endParaRPr lang="en-US" sz="4400" dirty="0"/>
+          </a:p>
+        </p:txBody>
+      </p:sp>
+      <p:sp>
+        <p:nvSpPr>
+          <p:cNvPr id="6" name="Text 2"/>
+          <p:cNvSpPr txBox="1"/>
+          <p:nvPr/>
+        </p:nvSpPr>
+        <p:spPr>
+          <a:xfrm>
+            <a:off x="8229600" y="2359152"/>
+            <a:ext cx="3383280" cy="868680"/>
+          </a:xfrm>
+          <a:prstGeom prst="rect">
+            <a:avLst/>
+          </a:prstGeom>
+          <a:noFill/>
+          <a:ln/>
+        </p:spPr>
+        <p:txBody>
+          <a:bodyPr wrap="square" lIns="0" tIns="0" rIns="0" bIns="0" rtlCol="0" anchor="t"/>
+          <a:lstStyle/>
+          <a:p>
+            <a:pPr indent="0" marL="0">
+              <a:buNone/>
+            </a:pPr>
+            <a:r>
+              <a:rPr lang="en-US" sz="1400" dirty="0">
+                <a:solidFill>
+                  <a:schemeClr val="tx2"/>
+                </a:solidFill>
+              </a:rPr>
+              <a:t>ก่อนวัน spike ถูกตัด เพราะ target มองไปข้างหน้า 5 วัน จึงรวมวัน spike</a:t>
+            </a:r>
+            <a:endParaRPr lang="en-US" sz="1400" dirty="0"/>
+          </a:p>
+        </p:txBody>
+      </p:sp>
+      <p:sp>
+        <p:nvSpPr>
+          <p:cNvPr id="7" name="Text 3"/>
+          <p:cNvSpPr txBox="1"/>
+          <p:nvPr/>
+        </p:nvSpPr>
+        <p:spPr>
+          <a:xfrm>
+            <a:off x="8229600" y="3337560"/>
+            <a:ext cx="3383280" cy="868680"/>
+          </a:xfrm>
+          <a:prstGeom prst="rect">
+            <a:avLst/>
+          </a:prstGeom>
+          <a:noFill/>
+          <a:ln/>
+        </p:spPr>
+        <p:txBody>
+          <a:bodyPr wrap="square" lIns="0" tIns="0" rIns="0" bIns="0" rtlCol="0" anchor="ctr"/>
+          <a:lstStyle/>
+          <a:p>
+            <a:pPr indent="0" marL="0">
+              <a:buNone/>
+            </a:pPr>
+            <a:r>
+              <a:rPr lang="en-US" sz="4400" b="1" dirty="0">
+                <a:solidFill>
+                  <a:schemeClr val="accent1"/>
+                </a:solidFill>
+              </a:rPr>
+              <a:t>19 วัน</a:t>
+            </a:r>
+            <a:endParaRPr lang="en-US" sz="4400" dirty="0"/>
+          </a:p>
+        </p:txBody>
+      </p:sp>
+      <p:sp>
+        <p:nvSpPr>
+          <p:cNvPr id="8" name="Text 4"/>
+          <p:cNvSpPr txBox="1"/>
+          <p:nvPr/>
+        </p:nvSpPr>
+        <p:spPr>
+          <a:xfrm>
+            <a:off x="8229600" y="4233672"/>
+            <a:ext cx="3383280" cy="868680"/>
+          </a:xfrm>
+          <a:prstGeom prst="rect">
+            <a:avLst/>
+          </a:prstGeom>
+          <a:noFill/>
+          <a:ln/>
+        </p:spPr>
+        <p:txBody>
+          <a:bodyPr wrap="square" lIns="0" tIns="0" rIns="0" bIns="0" rtlCol="0" anchor="t"/>
+          <a:lstStyle/>
+          <a:p>
+            <a:pPr indent="0" marL="0">
+              <a:buNone/>
+            </a:pPr>
+            <a:r>
+              <a:rPr lang="en-US" sz="1400" dirty="0">
+                <a:solidFill>
+                  <a:schemeClr val="tx2"/>
+                </a:solidFill>
+              </a:rPr>
+              <a:t>หลังวัน spike ถูกตัด เพราะฟีเจอร์ย้อนหลัง 20 วันยังมีวัน spike อยู่ข้างใน</a:t>
+            </a:r>
+            <a:endParaRPr lang="en-US" sz="1400" dirty="0"/>
+          </a:p>
+        </p:txBody>
+      </p:sp>
+      <p:sp>
+        <p:nvSpPr>
+          <p:cNvPr id="9" name="Text 5"/>
+          <p:cNvSpPr txBox="1"/>
+          <p:nvPr/>
+        </p:nvSpPr>
+        <p:spPr>
+          <a:xfrm>
+            <a:off x="8229600" y="5212080"/>
+            <a:ext cx="3383280" cy="1005840"/>
+          </a:xfrm>
+          <a:prstGeom prst="rect">
+            <a:avLst/>
+          </a:prstGeom>
+          <a:noFill/>
+          <a:ln/>
+        </p:spPr>
+        <p:txBody>
+          <a:bodyPr wrap="square" lIns="0" tIns="0" rIns="0" bIns="0" rtlCol="0" anchor="t"/>
+          <a:lstStyle/>
+          <a:p>
+            <a:pPr indent="0" marL="0">
+              <a:buNone/>
+            </a:pPr>
+            <a:r>
+              <a:rPr lang="en-US" sz="1400" dirty="0">
+                <a:solidFill>
+                  <a:schemeClr val="tx2"/>
+                </a:solidFill>
+              </a:rPr>
+              <a:t>ตัวอย่างจริง 26 ธ.ค. 2018: target กระโดดจาก 0.24 เป็น 0.62 ที่ระยะ 5 วันก่อน spike</a:t>
+            </a:r>
+            <a:endParaRPr lang="en-US" sz="1400" dirty="0"/>
+          </a:p>
+        </p:txBody>
+      </p:sp>
+      <p:sp>
+        <p:nvSpPr>
+          <p:cNvPr id="10" name="Text 6"/>
+          <p:cNvSpPr txBox="1"/>
+          <p:nvPr/>
+        </p:nvSpPr>
+        <p:spPr>
+          <a:xfrm>
+            <a:off x="548640" y="5532120"/>
+            <a:ext cx="7315200" cy="640080"/>
+          </a:xfrm>
+          <a:prstGeom prst="rect">
+            <a:avLst/>
+          </a:prstGeom>
+          <a:noFill/>
+          <a:ln/>
+        </p:spPr>
+        <p:txBody>
+          <a:bodyPr wrap="square" lIns="0" tIns="0" rIns="0" bIns="0" rtlCol="0" anchor="t"/>
+          <a:lstStyle/>
+          <a:p>
+            <a:pPr indent="0" marL="0">
+              <a:buNone/>
+            </a:pPr>
+            <a:r>
+              <a:rPr lang="en-US" sz="1200" dirty="0">
+                <a:solidFill>
+                  <a:schemeClr val="tx2"/>
+                </a:solidFill>
+              </a:rPr>
+              <a:t>พื้นที่แรเงาคือ 25 แถวที่ถูกตัด · หน้าต่างของ spike ที่อยู่ใกล้กันซ้อนกัน รวมทั้งหมด 213 แถว</a:t>
+            </a:r>
+            <a:endParaRPr lang="en-US" sz="1200" dirty="0"/>
+          </a:p>
+          <a:p>
+            <a:pPr indent="0" marL="0">
+              <a:buNone/>
+            </a:pPr>
+            <a:r>
+              <a:rPr lang="en-US" sz="1200" dirty="0">
+                <a:solidFill>
+                  <a:schemeClr val="tx2"/>
+                </a:solidFill>
+              </a:rPr>
+              <a:t>ที่มา: notebooks/06_spike_analysis.ipynb</a:t>
+            </a:r>
+            <a:endParaRPr lang="en-US" sz="1200" dirty="0"/>
+          </a:p>
+        </p:txBody>
+      </p:sp>
+      <p:sp>
+        <p:nvSpPr>
+          <p:cNvPr id="25" name="Slide Number Placeholder 0"/>
+          <p:cNvSpPr>
+            <a:spLocks noGrp="1"/>
+          </p:cNvSpPr>
+          <p:nvPr>
+            <p:ph type="sldNum" sz="quarter" idx="4294967295"/>
+          </p:nvPr>
+        </p:nvSpPr>
+        <p:spPr>
+          <a:xfrm>
+            <a:off x="11091672" y="6419088"/>
+            <a:ext cx="548640" cy="274320"/>
+          </a:xfrm>
+          <a:prstGeom prst="rect">
+            <a:avLst/>
+          </a:prstGeom>
+          <a:extLst>
+            <a:ext uri="{C572A759-6A51-4108-AA02-DFA0A04FC94B}">
+              <ma14:wrappingTextBoxFlag xmlns:ma14="http://schemas.microsoft.com/office/mac/drawingml/2011/main" val="0"/>
+            </a:ext>
+          </a:extLst>
+        </p:spPr>
+        <p:txBody>
+          <a:bodyPr/>
+          <a:lstStyle>
+            <a:lvl1pPr>
+              <a:defRPr sz="1000">
+                <a:solidFill>
+                  <a:schemeClr val="tx2"/>
+                </a:solidFill>
+              </a:defRPr>
+            </a:lvl1pPr>
+          </a:lstStyle>
+          <a:p>
+            <a:pPr algn="r"/>
+            <a:fld id="{F7021451-1387-4CA6-816F-3879F97B5CBC}" type="slidenum">
+              <a:rPr b="0" lang="en-US"/>
+              <a:t>10</a:t>
             </a:fld>
             <a:endParaRPr lang="en-US"/>
           </a:p>
@@ -20735,7 +21637,7 @@
             <a:pPr algn="r"/>
             <a:fld id="{F7021451-1387-4CA6-816F-3879F97B5CBC}" type="slidenum">
               <a:rPr b="0" lang="en-US"/>
-              <a:t>9</a:t>
+              <a:t>11</a:t>
             </a:fld>
             <a:endParaRPr lang="en-US"/>
           </a:p>
